--- a/dist/초5/수학/자연수의계산/초5_수학_자연수의계산_01_자연수의혼합계산_학생용.pptx
+++ b/dist/초5/수학/자연수의계산/초5_수학_자연수의계산_01_자연수의혼합계산_학생용.pptx
@@ -119,13 +119,13 @@
   <p:extLst>
     <p:ext uri="{521415D9-36F7-43E2-AB2F-B90AF26B5E84}">
       <p14:sectionLst xmlns:p14="http://schemas.microsoft.com/office/powerpoint/2010/main">
-        <p14:section name="도입" id="{8b72fbc8-6e16-658a-2e67-1ade2b465819}">
+        <p14:section name="도입" id="{4faf34a9-651a-10cb-5d5a-480c12d9d4b4}">
           <p14:sldIdLst>
             <p14:sldId id="256"/>
             <p14:sldId id="257"/>
           </p14:sldIdLst>
         </p14:section>
-        <p14:section name="개념" id="{a41281f2-8023-38c9-76c7-5067a175e230}">
+        <p14:section name="개념" id="{e5006636-4e04-93ea-a223-68c93717dfb5}">
           <p14:sldIdLst>
             <p14:sldId id="258"/>
             <p14:sldId id="259"/>
@@ -133,37 +133,37 @@
             <p14:sldId id="263"/>
           </p14:sldIdLst>
         </p14:section>
-        <p14:section name="연습" id="{996b3911-5395-ed89-574e-be302b46041f}">
+        <p14:section name="연습" id="{972e4bda-01c8-4c2f-5aba-73f4e0e2cda0}">
           <p14:sldIdLst>
             <p14:sldId id="260"/>
             <p14:sldId id="262"/>
             <p14:sldId id="264"/>
           </p14:sldIdLst>
         </p14:section>
-        <p14:section name="개념" id="{a79dfa05-ad61-8569-c61f-42990a826ab1}">
+        <p14:section name="개념" id="{654f9349-29bd-4244-e122-8533d996040a}">
           <p14:sldIdLst/>
         </p14:section>
-        <p14:section name="연습" id="{e533c3c8-b878-d2a3-d795-46b57f524802}">
+        <p14:section name="연습" id="{69755be6-58f8-bde9-b534-492661424416}">
           <p14:sldIdLst/>
         </p14:section>
-        <p14:section name="개념" id="{0163235e-7db5-fc44-23cd-09a8350da192}">
+        <p14:section name="개념" id="{be96f35d-2b86-09fe-28c2-85d42fb444c5}">
           <p14:sldIdLst/>
         </p14:section>
-        <p14:section name="연습" id="{c971b794-3832-28af-4eb6-75207a8a4238}">
+        <p14:section name="연습" id="{89247cd0-e4a1-f190-ffc3-c34cd416a784}">
           <p14:sldIdLst/>
         </p14:section>
-        <p14:section name="확인" id="{7cae133d-a220-b6ed-ab16-b41c3ee4afed}">
+        <p14:section name="확인" id="{b79477b0-52a7-1f48-57bb-6e6724dee62e}">
           <p14:sldIdLst>
             <p14:sldId id="265"/>
             <p14:sldId id="266"/>
           </p14:sldIdLst>
         </p14:section>
-        <p14:section name="정리" id="{dfd2f415-9cf4-4b83-8973-6206c14319fa}">
+        <p14:section name="정리" id="{ea55d08e-46f8-e0f1-91b7-44c7b83f9a27}">
           <p14:sldIdLst>
             <p14:sldId id="267"/>
           </p14:sldIdLst>
         </p14:section>
-        <p14:section name="보충" id="{2b276b7b-d3db-01fb-aa29-6240820a36c9}">
+        <p14:section name="보충" id="{1b5b4a36-684c-c14b-ed8d-f16cbf8e59e1}">
           <p14:sldIdLst>
             <p14:sldId id="268"/>
           </p14:sldIdLst>
